--- a/sunriseRobot/app_SunriseRobot/info/ps2_controller_map_en.pptx
+++ b/sunriseRobot/app_SunriseRobot/info/ps2_controller_map_en.pptx
@@ -264,7 +264,7 @@
           <a:p>
             <a:fld id="{60B78028-44F6-416E-B0AB-FAA3EA91683A}" type="datetimeFigureOut">
               <a:rPr lang="en-US" smtClean="0"/>
-              <a:t>8/25/2025</a:t>
+              <a:t>7/19/2026</a:t>
             </a:fld>
             <a:endParaRPr lang="en-US"/>
           </a:p>
@@ -462,7 +462,7 @@
           <a:p>
             <a:fld id="{60B78028-44F6-416E-B0AB-FAA3EA91683A}" type="datetimeFigureOut">
               <a:rPr lang="en-US" smtClean="0"/>
-              <a:t>8/25/2025</a:t>
+              <a:t>7/19/2026</a:t>
             </a:fld>
             <a:endParaRPr lang="en-US"/>
           </a:p>
@@ -670,7 +670,7 @@
           <a:p>
             <a:fld id="{60B78028-44F6-416E-B0AB-FAA3EA91683A}" type="datetimeFigureOut">
               <a:rPr lang="en-US" smtClean="0"/>
-              <a:t>8/25/2025</a:t>
+              <a:t>7/19/2026</a:t>
             </a:fld>
             <a:endParaRPr lang="en-US"/>
           </a:p>
@@ -868,7 +868,7 @@
           <a:p>
             <a:fld id="{60B78028-44F6-416E-B0AB-FAA3EA91683A}" type="datetimeFigureOut">
               <a:rPr lang="en-US" smtClean="0"/>
-              <a:t>8/25/2025</a:t>
+              <a:t>7/19/2026</a:t>
             </a:fld>
             <a:endParaRPr lang="en-US"/>
           </a:p>
@@ -1143,7 +1143,7 @@
           <a:p>
             <a:fld id="{60B78028-44F6-416E-B0AB-FAA3EA91683A}" type="datetimeFigureOut">
               <a:rPr lang="en-US" smtClean="0"/>
-              <a:t>8/25/2025</a:t>
+              <a:t>7/19/2026</a:t>
             </a:fld>
             <a:endParaRPr lang="en-US"/>
           </a:p>
@@ -1408,7 +1408,7 @@
           <a:p>
             <a:fld id="{60B78028-44F6-416E-B0AB-FAA3EA91683A}" type="datetimeFigureOut">
               <a:rPr lang="en-US" smtClean="0"/>
-              <a:t>8/25/2025</a:t>
+              <a:t>7/19/2026</a:t>
             </a:fld>
             <a:endParaRPr lang="en-US"/>
           </a:p>
@@ -1820,7 +1820,7 @@
           <a:p>
             <a:fld id="{60B78028-44F6-416E-B0AB-FAA3EA91683A}" type="datetimeFigureOut">
               <a:rPr lang="en-US" smtClean="0"/>
-              <a:t>8/25/2025</a:t>
+              <a:t>7/19/2026</a:t>
             </a:fld>
             <a:endParaRPr lang="en-US"/>
           </a:p>
@@ -1961,7 +1961,7 @@
           <a:p>
             <a:fld id="{60B78028-44F6-416E-B0AB-FAA3EA91683A}" type="datetimeFigureOut">
               <a:rPr lang="en-US" smtClean="0"/>
-              <a:t>8/25/2025</a:t>
+              <a:t>7/19/2026</a:t>
             </a:fld>
             <a:endParaRPr lang="en-US"/>
           </a:p>
@@ -2074,7 +2074,7 @@
           <a:p>
             <a:fld id="{60B78028-44F6-416E-B0AB-FAA3EA91683A}" type="datetimeFigureOut">
               <a:rPr lang="en-US" smtClean="0"/>
-              <a:t>8/25/2025</a:t>
+              <a:t>7/19/2026</a:t>
             </a:fld>
             <a:endParaRPr lang="en-US"/>
           </a:p>
@@ -2385,7 +2385,7 @@
           <a:p>
             <a:fld id="{60B78028-44F6-416E-B0AB-FAA3EA91683A}" type="datetimeFigureOut">
               <a:rPr lang="en-US" smtClean="0"/>
-              <a:t>8/25/2025</a:t>
+              <a:t>7/19/2026</a:t>
             </a:fld>
             <a:endParaRPr lang="en-US"/>
           </a:p>
@@ -2673,7 +2673,7 @@
           <a:p>
             <a:fld id="{60B78028-44F6-416E-B0AB-FAA3EA91683A}" type="datetimeFigureOut">
               <a:rPr lang="en-US" smtClean="0"/>
-              <a:t>8/25/2025</a:t>
+              <a:t>7/19/2026</a:t>
             </a:fld>
             <a:endParaRPr lang="en-US"/>
           </a:p>
@@ -2914,7 +2914,7 @@
           <a:p>
             <a:fld id="{60B78028-44F6-416E-B0AB-FAA3EA91683A}" type="datetimeFigureOut">
               <a:rPr lang="en-US" smtClean="0"/>
-              <a:t>8/25/2025</a:t>
+              <a:t>7/19/2026</a:t>
             </a:fld>
             <a:endParaRPr lang="en-US"/>
           </a:p>
@@ -3809,6 +3809,95 @@
           </a:fontRef>
         </p:style>
       </p:cxnSp>
+      <p:sp>
+        <p:nvSpPr>
+          <p:cNvPr id="5" name="TextBox 4">
+            <a:extLst>
+              <a:ext uri="{FF2B5EF4-FFF2-40B4-BE49-F238E27FC236}">
+                <a16:creationId xmlns:a16="http://schemas.microsoft.com/office/drawing/2014/main" id="{6B65A068-21D3-5140-764D-5D547FA5B583}"/>
+              </a:ext>
+            </a:extLst>
+          </p:cNvPr>
+          <p:cNvSpPr txBox="1"/>
+          <p:nvPr/>
+        </p:nvSpPr>
+        <p:spPr>
+          <a:xfrm>
+            <a:off x="9152785" y="3301453"/>
+            <a:ext cx="2962302" cy="2031325"/>
+          </a:xfrm>
+          <a:prstGeom prst="rect">
+            <a:avLst/>
+          </a:prstGeom>
+          <a:noFill/>
+          <a:ln w="28575">
+            <a:solidFill>
+              <a:srgbClr val="00B0F0"/>
+            </a:solidFill>
+          </a:ln>
+        </p:spPr>
+        <p:txBody>
+          <a:bodyPr wrap="square" rtlCol="0">
+            <a:spAutoFit/>
+          </a:bodyPr>
+          <a:lstStyle/>
+          <a:p>
+            <a:r>
+              <a:rPr lang="en-US" b="1" noProof="0" dirty="0"/>
+              <a:t>Push-to-talk to AI</a:t>
+            </a:r>
+            <a:r>
+              <a:rPr lang="en-US" noProof="0" dirty="0"/>
+              <a:t>: while pressed, the robot’s microphone register. After release, the recording is sent to an AI that can see from the robot camera, talk, and move the robot</a:t>
+            </a:r>
+          </a:p>
+        </p:txBody>
+      </p:sp>
+      <p:cxnSp>
+        <p:nvCxnSpPr>
+          <p:cNvPr id="6" name="Straight Arrow Connector 5">
+            <a:extLst>
+              <a:ext uri="{FF2B5EF4-FFF2-40B4-BE49-F238E27FC236}">
+                <a16:creationId xmlns:a16="http://schemas.microsoft.com/office/drawing/2014/main" id="{0F96D4D4-3EDE-38DE-E077-5B38C2D1A9FD}"/>
+              </a:ext>
+            </a:extLst>
+          </p:cNvPr>
+          <p:cNvCxnSpPr>
+            <a:cxnSpLocks/>
+            <a:stCxn id="5" idx="1"/>
+          </p:cNvCxnSpPr>
+          <p:nvPr/>
+        </p:nvCxnSpPr>
+        <p:spPr>
+          <a:xfrm flipH="1" flipV="1">
+            <a:off x="7862131" y="3902279"/>
+            <a:ext cx="1290654" cy="414837"/>
+          </a:xfrm>
+          <a:prstGeom prst="straightConnector1">
+            <a:avLst/>
+          </a:prstGeom>
+          <a:ln w="19050">
+            <a:solidFill>
+              <a:srgbClr val="00B0F0"/>
+            </a:solidFill>
+            <a:tailEnd type="triangle"/>
+          </a:ln>
+        </p:spPr>
+        <p:style>
+          <a:lnRef idx="2">
+            <a:schemeClr val="accent1"/>
+          </a:lnRef>
+          <a:fillRef idx="0">
+            <a:schemeClr val="accent1"/>
+          </a:fillRef>
+          <a:effectRef idx="1">
+            <a:schemeClr val="accent1"/>
+          </a:effectRef>
+          <a:fontRef idx="minor">
+            <a:schemeClr val="tx1"/>
+          </a:fontRef>
+        </p:style>
+      </p:cxnSp>
     </p:spTree>
     <p:extLst>
       <p:ext uri="{BB962C8B-B14F-4D97-AF65-F5344CB8AC3E}">
@@ -7871,51 +7960,6 @@
           </a:fontRef>
         </p:style>
       </p:cxnSp>
-      <p:cxnSp>
-        <p:nvCxnSpPr>
-          <p:cNvPr id="25" name="Straight Arrow Connector 24">
-            <a:extLst>
-              <a:ext uri="{FF2B5EF4-FFF2-40B4-BE49-F238E27FC236}">
-                <a16:creationId xmlns:a16="http://schemas.microsoft.com/office/drawing/2014/main" id="{DA6B3284-EBE8-7403-8446-87F461A57DD6}"/>
-              </a:ext>
-            </a:extLst>
-          </p:cNvPr>
-          <p:cNvCxnSpPr>
-            <a:cxnSpLocks/>
-            <a:stCxn id="18" idx="1"/>
-          </p:cNvCxnSpPr>
-          <p:nvPr/>
-        </p:nvCxnSpPr>
-        <p:spPr>
-          <a:xfrm flipH="1">
-            <a:off x="7691215" y="871182"/>
-            <a:ext cx="1205191" cy="2760769"/>
-          </a:xfrm>
-          <a:prstGeom prst="straightConnector1">
-            <a:avLst/>
-          </a:prstGeom>
-          <a:ln w="19050">
-            <a:solidFill>
-              <a:srgbClr val="47D45A"/>
-            </a:solidFill>
-            <a:tailEnd type="triangle"/>
-          </a:ln>
-        </p:spPr>
-        <p:style>
-          <a:lnRef idx="2">
-            <a:schemeClr val="accent1"/>
-          </a:lnRef>
-          <a:fillRef idx="0">
-            <a:schemeClr val="accent1"/>
-          </a:fillRef>
-          <a:effectRef idx="1">
-            <a:schemeClr val="accent1"/>
-          </a:effectRef>
-          <a:fontRef idx="minor">
-            <a:schemeClr val="tx1"/>
-          </a:fontRef>
-        </p:style>
-      </p:cxnSp>
       <p:sp>
         <p:nvSpPr>
           <p:cNvPr id="28" name="TextBox 27">
@@ -7960,12 +8004,16 @@
               <a:buChar char="•"/>
             </a:pPr>
             <a:r>
-              <a:rPr lang="en-US" b="1" noProof="0" dirty="0"/>
-              <a:t>A</a:t>
+              <a:rPr lang="en-US" b="1" noProof="0"/>
+              <a:t>Y</a:t>
+            </a:r>
+            <a:r>
+              <a:rPr lang="en-US" noProof="0"/>
+              <a:t>: </a:t>
             </a:r>
             <a:r>
               <a:rPr lang="en-US" noProof="0" dirty="0"/>
-              <a:t>: vertical</a:t>
+              <a:t>vertical</a:t>
             </a:r>
           </a:p>
           <a:p>
